--- a/reports/2026-09_月次実績報告/令和8年9月実績報告.pptx
+++ b/reports/2026-09_月次実績報告/令和8年9月実績報告.pptx
@@ -263,16 +263,16 @@
                   <c:v>114.7</c:v>
                 </c:pt>
                 <c:pt idx="2">
-                  <c:v>127.2</c:v>
+                  <c:v>127.6</c:v>
                 </c:pt>
                 <c:pt idx="3">
-                  <c:v>143.1</c:v>
+                  <c:v>142.8</c:v>
                 </c:pt>
                 <c:pt idx="4">
                   <c:v>91.1</c:v>
                 </c:pt>
                 <c:pt idx="5">
-                  <c:v>122.3</c:v>
+                  <c:v>122.0</c:v>
                 </c:pt>
                 <c:pt idx="6">
                   <c:v>97.7</c:v>
@@ -342,16 +342,16 @@
                   <c:v>107.1</c:v>
                 </c:pt>
                 <c:pt idx="2">
-                  <c:v>119.7</c:v>
+                  <c:v>119.9</c:v>
                 </c:pt>
                 <c:pt idx="3">
-                  <c:v>120.0</c:v>
+                  <c:v>119.9</c:v>
                 </c:pt>
                 <c:pt idx="4">
                   <c:v>96.0</c:v>
                 </c:pt>
                 <c:pt idx="5">
-                  <c:v>131.6</c:v>
+                  <c:v>131.4</c:v>
                 </c:pt>
                 <c:pt idx="6">
                   <c:v>95.3</c:v>
@@ -639,16 +639,16 @@
                   <c:v>7911</c:v>
                 </c:pt>
                 <c:pt idx="2">
-                  <c:v>11902</c:v>
+                  <c:v>12081</c:v>
                 </c:pt>
                 <c:pt idx="3">
-                  <c:v>16337</c:v>
+                  <c:v>16229</c:v>
                 </c:pt>
                 <c:pt idx="4">
                   <c:v>-6887</c:v>
                 </c:pt>
                 <c:pt idx="5">
-                  <c:v>15263</c:v>
+                  <c:v>15050</c:v>
                 </c:pt>
                 <c:pt idx="6">
                   <c:v>-190</c:v>
@@ -718,16 +718,16 @@
                   <c:v>7917</c:v>
                 </c:pt>
                 <c:pt idx="2">
-                  <c:v>17870</c:v>
+                  <c:v>18049</c:v>
                 </c:pt>
                 <c:pt idx="3">
-                  <c:v>15126</c:v>
+                  <c:v>15018</c:v>
                 </c:pt>
                 <c:pt idx="4">
                   <c:v>-6108</c:v>
                 </c:pt>
                 <c:pt idx="5">
-                  <c:v>39461</c:v>
+                  <c:v>39248</c:v>
                 </c:pt>
                 <c:pt idx="6">
                   <c:v>-873</c:v>
@@ -4156,7 +4156,7 @@
                 </a:solidFill>
                 <a:latin typeface="Meiryo UI"/>
               </a:rPr>
-              <a:t>・ 第51期通期は売上107.8%・粗利112.1%（計画比104.1%）で増収増益着地。下期粗利は前期比116.2%</a:t>
+              <a:t>・ 第51期通期は売上107.8%・粗利112.1%（計画比104.1%）で増収増益着地。下期粗利は前期比116.1%</a:t>
             </a:r>
           </a:p>
         </p:txBody>
@@ -5438,7 +5438,7 @@
                 </a:solidFill>
                 <a:latin typeface="Meiryo UI"/>
               </a:rPr>
-              <a:t>461,606</a:t>
+              <a:t>461,463</a:t>
             </a:r>
           </a:p>
         </p:txBody>
@@ -5508,7 +5508,7 @@
                 </a:solidFill>
                 <a:latin typeface="Meiryo UI"/>
               </a:rPr>
-              <a:t>前期比 116.2% / 計画比 112.1%</a:t>
+              <a:t>前期比 116.1% / 計画比 112.0%</a:t>
             </a:r>
           </a:p>
         </p:txBody>
@@ -5668,7 +5668,7 @@
                 </a:solidFill>
                 <a:latin typeface="Meiryo UI"/>
               </a:rPr>
-              <a:t>1,877,568</a:t>
+              <a:t>1,877,406</a:t>
             </a:r>
           </a:p>
         </p:txBody>
@@ -6128,7 +6128,7 @@
                 </a:solidFill>
                 <a:latin typeface="Meiryo UI"/>
               </a:rPr>
-              <a:t>888,502</a:t>
+              <a:t>888,359</a:t>
             </a:r>
           </a:p>
         </p:txBody>
@@ -6358,7 +6358,7 @@
                 </a:solidFill>
                 <a:latin typeface="Meiryo UI"/>
               </a:rPr>
-              <a:t>3,707,003</a:t>
+              <a:t>3,706,841</a:t>
             </a:r>
           </a:p>
         </p:txBody>
@@ -9173,7 +9173,7 @@
                           </a:solidFill>
                           <a:latin typeface="Meiryo UI"/>
                         </a:rPr>
-                        <a:t>438,135</a:t>
+                        <a:t>438,136</a:t>
                       </a:r>
                     </a:p>
                   </a:txBody>
@@ -9242,7 +9242,7 @@
                           </a:solidFill>
                           <a:latin typeface="Meiryo UI"/>
                         </a:rPr>
-                        <a:t>127,957</a:t>
+                        <a:t>127,956</a:t>
                       </a:r>
                     </a:p>
                   </a:txBody>
@@ -9545,7 +9545,7 @@
                           </a:solidFill>
                           <a:latin typeface="Meiryo UI"/>
                         </a:rPr>
-                        <a:t>211,608</a:t>
+                        <a:t>211,649</a:t>
                       </a:r>
                     </a:p>
                   </a:txBody>
@@ -9614,7 +9614,7 @@
                           </a:solidFill>
                           <a:latin typeface="Meiryo UI"/>
                         </a:rPr>
-                        <a:t>55,662</a:t>
+                        <a:t>55,841</a:t>
                       </a:r>
                     </a:p>
                   </a:txBody>
@@ -9637,7 +9637,7 @@
                           </a:solidFill>
                           <a:latin typeface="Meiryo UI"/>
                         </a:rPr>
-                        <a:t>127.2%</a:t>
+                        <a:t>127.6%</a:t>
                       </a:r>
                     </a:p>
                   </a:txBody>
@@ -9660,7 +9660,7 @@
                           </a:solidFill>
                           <a:latin typeface="Meiryo UI"/>
                         </a:rPr>
-                        <a:t>122.1%</a:t>
+                        <a:t>122.5%</a:t>
                       </a:r>
                     </a:p>
                   </a:txBody>
@@ -9683,7 +9683,7 @@
                           </a:solidFill>
                           <a:latin typeface="Meiryo UI"/>
                         </a:rPr>
-                        <a:t>26.3%</a:t>
+                        <a:t>26.4%</a:t>
                       </a:r>
                     </a:p>
                   </a:txBody>
@@ -9800,7 +9800,7 @@
                           </a:solidFill>
                           <a:latin typeface="Meiryo UI"/>
                         </a:rPr>
-                        <a:t>54,270</a:t>
+                        <a:t>54,162</a:t>
                       </a:r>
                     </a:p>
                   </a:txBody>
@@ -9823,7 +9823,7 @@
                           </a:solidFill>
                           <a:latin typeface="Meiryo UI"/>
                         </a:rPr>
-                        <a:t>143.1%</a:t>
+                        <a:t>142.8%</a:t>
                       </a:r>
                     </a:p>
                   </a:txBody>
@@ -9846,7 +9846,7 @@
                           </a:solidFill>
                           <a:latin typeface="Meiryo UI"/>
                         </a:rPr>
-                        <a:t>136.5%</a:t>
+                        <a:t>136.2%</a:t>
                       </a:r>
                     </a:p>
                   </a:txBody>
@@ -10103,7 +10103,7 @@
                           </a:solidFill>
                           <a:latin typeface="Meiryo UI"/>
                         </a:rPr>
-                        <a:t>284,711</a:t>
+                        <a:t>284,508</a:t>
                       </a:r>
                     </a:p>
                   </a:txBody>
@@ -10126,7 +10126,7 @@
                           </a:solidFill>
                           <a:latin typeface="Meiryo UI"/>
                         </a:rPr>
-                        <a:t>129.1%</a:t>
+                        <a:t>129.0%</a:t>
                       </a:r>
                     </a:p>
                   </a:txBody>
@@ -10149,7 +10149,7 @@
                           </a:solidFill>
                           <a:latin typeface="Meiryo UI"/>
                         </a:rPr>
-                        <a:t>119.1%</a:t>
+                        <a:t>119.0%</a:t>
                       </a:r>
                     </a:p>
                   </a:txBody>
@@ -10172,7 +10172,7 @@
                           </a:solidFill>
                           <a:latin typeface="Meiryo UI"/>
                         </a:rPr>
-                        <a:t>83,672</a:t>
+                        <a:t>83,459</a:t>
                       </a:r>
                     </a:p>
                   </a:txBody>
@@ -10195,7 +10195,7 @@
                           </a:solidFill>
                           <a:latin typeface="Meiryo UI"/>
                         </a:rPr>
-                        <a:t>122.3%</a:t>
+                        <a:t>122.0%</a:t>
                       </a:r>
                     </a:p>
                   </a:txBody>
@@ -10218,7 +10218,7 @@
                           </a:solidFill>
                           <a:latin typeface="Meiryo UI"/>
                         </a:rPr>
-                        <a:t>116.3%</a:t>
+                        <a:t>116.0%</a:t>
                       </a:r>
                     </a:p>
                   </a:txBody>
@@ -10241,7 +10241,7 @@
                           </a:solidFill>
                           <a:latin typeface="Meiryo UI"/>
                         </a:rPr>
-                        <a:t>29.4%</a:t>
+                        <a:t>29.3%</a:t>
                       </a:r>
                     </a:p>
                   </a:txBody>
@@ -10289,7 +10289,7 @@
                           </a:solidFill>
                           <a:latin typeface="Meiryo UI"/>
                         </a:rPr>
-                        <a:t>14,163</a:t>
+                        <a:t>14,164</a:t>
                       </a:r>
                     </a:p>
                   </a:txBody>
@@ -10475,7 +10475,7 @@
                           </a:solidFill>
                           <a:latin typeface="Meiryo UI"/>
                         </a:rPr>
-                        <a:t>1,877,568</a:t>
+                        <a:t>1,877,406</a:t>
                       </a:r>
                     </a:p>
                   </a:txBody>
@@ -10544,7 +10544,7 @@
                           </a:solidFill>
                           <a:latin typeface="Meiryo UI"/>
                         </a:rPr>
-                        <a:t>461,606</a:t>
+                        <a:t>461,463</a:t>
                       </a:r>
                     </a:p>
                   </a:txBody>
@@ -10567,7 +10567,7 @@
                           </a:solidFill>
                           <a:latin typeface="Meiryo UI"/>
                         </a:rPr>
-                        <a:t>116.2%</a:t>
+                        <a:t>116.1%</a:t>
                       </a:r>
                     </a:p>
                   </a:txBody>
@@ -10590,7 +10590,7 @@
                           </a:solidFill>
                           <a:latin typeface="Meiryo UI"/>
                         </a:rPr>
-                        <a:t>112.1%</a:t>
+                        <a:t>112.0%</a:t>
                       </a:r>
                     </a:p>
                   </a:txBody>
@@ -10658,7 +10658,7 @@
                 </a:solidFill>
                 <a:latin typeface="Meiryo UI"/>
               </a:rPr>
-              <a:t>※ 下期粗利益額461,606千円・前期比116.2%・計画比112.1%（売上109.0%・105.2%）。境港は前期比91.1%・計画比94.4%、キョウワは前期比97.7%と前期を下回る</a:t>
+              <a:t>※ 下期粗利益額461,463千円・前期比116.1%・計画比112.0%（売上109.0%・105.2%）。境港は前期比91.1%・計画比94.4%、キョウワは前期比97.7%と前期を下回る</a:t>
             </a:r>
           </a:p>
         </p:txBody>
@@ -11173,7 +11173,7 @@
                           </a:solidFill>
                           <a:latin typeface="Meiryo UI"/>
                         </a:rPr>
-                        <a:t>869,161</a:t>
+                        <a:t>869,162</a:t>
                       </a:r>
                     </a:p>
                   </a:txBody>
@@ -11242,7 +11242,7 @@
                           </a:solidFill>
                           <a:latin typeface="Meiryo UI"/>
                         </a:rPr>
-                        <a:t>242,967</a:t>
+                        <a:t>242,966</a:t>
                       </a:r>
                     </a:p>
                   </a:txBody>
@@ -11545,7 +11545,7 @@
                           </a:solidFill>
                           <a:latin typeface="Meiryo UI"/>
                         </a:rPr>
-                        <a:t>447,818</a:t>
+                        <a:t>447,859</a:t>
                       </a:r>
                     </a:p>
                   </a:txBody>
@@ -11614,7 +11614,7 @@
                           </a:solidFill>
                           <a:latin typeface="Meiryo UI"/>
                         </a:rPr>
-                        <a:t>108,406</a:t>
+                        <a:t>108,585</a:t>
                       </a:r>
                     </a:p>
                   </a:txBody>
@@ -11637,7 +11637,7 @@
                           </a:solidFill>
                           <a:latin typeface="Meiryo UI"/>
                         </a:rPr>
-                        <a:t>119.7%</a:t>
+                        <a:t>119.9%</a:t>
                       </a:r>
                     </a:p>
                   </a:txBody>
@@ -11660,7 +11660,7 @@
                           </a:solidFill>
                           <a:latin typeface="Meiryo UI"/>
                         </a:rPr>
-                        <a:t>111.4%</a:t>
+                        <a:t>111.6%</a:t>
                       </a:r>
                     </a:p>
                   </a:txBody>
@@ -11800,7 +11800,7 @@
                           </a:solidFill>
                           <a:latin typeface="Meiryo UI"/>
                         </a:rPr>
-                        <a:t>90,729</a:t>
+                        <a:t>90,621</a:t>
                       </a:r>
                     </a:p>
                   </a:txBody>
@@ -11823,7 +11823,7 @@
                           </a:solidFill>
                           <a:latin typeface="Meiryo UI"/>
                         </a:rPr>
-                        <a:t>120.0%</a:t>
+                        <a:t>119.9%</a:t>
                       </a:r>
                     </a:p>
                   </a:txBody>
@@ -11846,7 +11846,7 @@
                           </a:solidFill>
                           <a:latin typeface="Meiryo UI"/>
                         </a:rPr>
-                        <a:t>107.8%</a:t>
+                        <a:t>107.6%</a:t>
                       </a:r>
                     </a:p>
                   </a:txBody>
@@ -12103,7 +12103,7 @@
                           </a:solidFill>
                           <a:latin typeface="Meiryo UI"/>
                         </a:rPr>
-                        <a:t>534,168</a:t>
+                        <a:t>533,965</a:t>
                       </a:r>
                     </a:p>
                   </a:txBody>
@@ -12126,7 +12126,7 @@
                           </a:solidFill>
                           <a:latin typeface="Meiryo UI"/>
                         </a:rPr>
-                        <a:t>128.3%</a:t>
+                        <a:t>128.2%</a:t>
                       </a:r>
                     </a:p>
                   </a:txBody>
@@ -12149,7 +12149,7 @@
                           </a:solidFill>
                           <a:latin typeface="Meiryo UI"/>
                         </a:rPr>
-                        <a:t>111.3%</a:t>
+                        <a:t>111.2%</a:t>
                       </a:r>
                     </a:p>
                   </a:txBody>
@@ -12172,7 +12172,7 @@
                           </a:solidFill>
                           <a:latin typeface="Meiryo UI"/>
                         </a:rPr>
-                        <a:t>164,454</a:t>
+                        <a:t>164,241</a:t>
                       </a:r>
                     </a:p>
                   </a:txBody>
@@ -12195,7 +12195,7 @@
                           </a:solidFill>
                           <a:latin typeface="Meiryo UI"/>
                         </a:rPr>
-                        <a:t>131.6%</a:t>
+                        <a:t>131.4%</a:t>
                       </a:r>
                     </a:p>
                   </a:txBody>
@@ -12218,7 +12218,7 @@
                           </a:solidFill>
                           <a:latin typeface="Meiryo UI"/>
                         </a:rPr>
-                        <a:t>110.6%</a:t>
+                        <a:t>110.4%</a:t>
                       </a:r>
                     </a:p>
                   </a:txBody>
@@ -12289,7 +12289,7 @@
                           </a:solidFill>
                           <a:latin typeface="Meiryo UI"/>
                         </a:rPr>
-                        <a:t>31,045</a:t>
+                        <a:t>31,046</a:t>
                       </a:r>
                     </a:p>
                   </a:txBody>
@@ -12475,7 +12475,7 @@
                           </a:solidFill>
                           <a:latin typeface="Meiryo UI"/>
                         </a:rPr>
-                        <a:t>3,707,003</a:t>
+                        <a:t>3,706,841</a:t>
                       </a:r>
                     </a:p>
                   </a:txBody>
@@ -12544,7 +12544,7 @@
                           </a:solidFill>
                           <a:latin typeface="Meiryo UI"/>
                         </a:rPr>
-                        <a:t>888,502</a:t>
+                        <a:t>888,359</a:t>
                       </a:r>
                     </a:p>
                   </a:txBody>
@@ -12658,7 +12658,7 @@
                 </a:solidFill>
                 <a:latin typeface="Meiryo UI"/>
               </a:rPr>
-              <a:t>※ 第51期通期の粗利益額888,502千円・前期比112.1%・計画比104.1%（売上107.8%・計画比100.8%）。境港（96.0%）・キョウワ（95.3%）以外の5部門が増益</a:t>
+              <a:t>※ 第51期通期の粗利益額888,359千円・前期比112.1%・計画比104.1%（売上107.8%・計画比100.8%）。境港（96.0%）・キョウワ（95.3%）以外の5部門が増益</a:t>
             </a:r>
           </a:p>
         </p:txBody>
@@ -12922,7 +12922,7 @@
                 </a:solidFill>
                 <a:latin typeface="Meiryo UI"/>
               </a:rPr>
-              <a:t>全社の粗利益額前期比は 単月106.3%／下期116.2%／通期112.1%。単月は境港のみ、下期・通期は境港とキョウワが前期を下回る（境港通期96.0%・キョウワ通期95.3%）</a:t>
+              <a:t>全社の粗利益額前期比は 単月106.3%／下期116.1%／通期112.1%。単月は境港のみ、下期・通期は境港とキョウワが前期を下回る（境港通期96.0%・キョウワ通期95.3%）</a:t>
             </a:r>
           </a:p>
         </p:txBody>
@@ -13186,7 +13186,7 @@
                 </a:solidFill>
                 <a:latin typeface="Meiryo UI"/>
               </a:rPr>
-              <a:t>9月単月の粗利は+4,747千円。境港▲6,089（前期岡野農場向け機械大口の反動）を 広域+3,250・松江+2,685・石見+2,617・下関+1,663 の増益で吸収。通期では水産部+39,461が最大の寄与</a:t>
+              <a:t>9月単月の粗利は+4,747千円。境港▲6,089（前期岡野農場向け機械大口の反動）を 広域+3,250・松江+2,685・石見+2,617・下関+1,663 の増益で吸収。通期では水産部+39,248が最大の寄与</a:t>
             </a:r>
           </a:p>
         </p:txBody>
@@ -13592,7 +13592,7 @@
                 </a:solidFill>
                 <a:latin typeface="Meiryo UI"/>
               </a:rPr>
-              <a:t>・ 通期売上3,707,003千円（前期比107.8%）・粗利888,502千円（112.1%）。下期粗利は前期比116.2%と上期から加速</a:t>
+              <a:t>・ 通期売上3,706,841千円（前期比107.8%）・粗利888,359千円（112.1%）。下期粗利は前期比116.1%と上期から加速</a:t>
             </a:r>
           </a:p>
         </p:txBody>
@@ -13822,7 +13822,7 @@
                 </a:solidFill>
                 <a:latin typeface="Meiryo UI"/>
               </a:rPr>
-              <a:t>・ 全社粗利前期比は7月114.0%→8月93.3%→9月106.3%。石見は粗利114.0%へ回復も売上計画比95.8%と未達</a:t>
+              <a:t>・ 全社粗利前期比は7月113.9%→8月93.3%→9月106.3%。石見は粗利114.0%へ回復も売上計画比95.8%と未達</a:t>
             </a:r>
           </a:p>
         </p:txBody>
@@ -14133,7 +14133,7 @@
                 </a:solidFill>
                 <a:latin typeface="Meiryo UI"/>
               </a:rPr>
-              <a:t>第51期は粗利益額888,502千円で増益着地。第52期は境港の立て直しと、価格改定効果一巡後の粗利率維持が焦点</a:t>
+              <a:t>第51期は粗利益額888,359千円で増益着地。第52期は境港の立て直しと、価格改定効果一巡後の粗利率維持が焦点</a:t>
             </a:r>
           </a:p>
         </p:txBody>

--- a/reports/2026-09_月次実績報告/令和8年9月実績報告.pptx
+++ b/reports/2026-09_月次実績報告/令和8年9月実績報告.pptx
@@ -4198,129 +4198,13 @@
       </p:sp>
       <p:sp>
         <p:nvSpPr>
-          <p:cNvPr id="11" name="Rectangle 10"/>
-          <p:cNvSpPr/>
-          <p:nvPr/>
-        </p:nvSpPr>
-        <p:spPr>
-          <a:xfrm>
-            <a:off x="548640" y="3785615"/>
-            <a:ext cx="7863840" cy="658368"/>
-          </a:xfrm>
-          <a:prstGeom prst="rect">
-            <a:avLst/>
-          </a:prstGeom>
-          <a:solidFill>
-            <a:srgbClr val="3A1F1F"/>
-          </a:solidFill>
-          <a:ln w="15875">
-            <a:solidFill>
-              <a:srgbClr val="7D1D1D"/>
-            </a:solidFill>
-          </a:ln>
-          <a:effectLst/>
-        </p:spPr>
-        <p:style>
-          <a:lnRef idx="1">
-            <a:schemeClr val="accent1"/>
-          </a:lnRef>
-          <a:fillRef idx="3">
-            <a:schemeClr val="accent1"/>
-          </a:fillRef>
-          <a:effectRef idx="2">
-            <a:schemeClr val="accent1"/>
-          </a:effectRef>
-          <a:fontRef idx="minor">
-            <a:schemeClr val="lt1"/>
-          </a:fontRef>
-        </p:style>
-        <p:txBody>
-          <a:bodyPr rtlCol="0" anchor="ctr"/>
-          <a:lstStyle/>
-          <a:p>
-            <a:pPr algn="ctr"/>
-          </a:p>
-        </p:txBody>
-      </p:sp>
-      <p:sp>
-        <p:nvSpPr>
-          <p:cNvPr id="12" name="TextBox 11"/>
-          <p:cNvSpPr txBox="1"/>
-          <p:nvPr/>
-        </p:nvSpPr>
-        <p:spPr>
-          <a:xfrm>
-            <a:off x="731520" y="3877056"/>
-            <a:ext cx="7498079" cy="256032"/>
-          </a:xfrm>
-          <a:prstGeom prst="rect">
-            <a:avLst/>
-          </a:prstGeom>
-          <a:noFill/>
-        </p:spPr>
-        <p:txBody>
-          <a:bodyPr wrap="square" lIns="0" rIns="0" tIns="0" bIns="0" anchor="t">
-            <a:spAutoFit/>
-          </a:bodyPr>
-          <a:lstStyle/>
-          <a:p>
-            <a:pPr algn="l"/>
-            <a:r>
-              <a:rPr sz="1200" b="1">
-                <a:solidFill>
-                  <a:srgbClr val="FF9E96"/>
-                </a:solidFill>
-                <a:latin typeface="Meiryo UI"/>
-              </a:rPr>
-              <a:t>【警戒】境港の通期減益と水産部・キョウワの粗利率低下</a:t>
-            </a:r>
-          </a:p>
-        </p:txBody>
-      </p:sp>
-      <p:sp>
-        <p:nvSpPr>
-          <p:cNvPr id="13" name="TextBox 12"/>
-          <p:cNvSpPr txBox="1"/>
-          <p:nvPr/>
-        </p:nvSpPr>
-        <p:spPr>
-          <a:xfrm>
-            <a:off x="731520" y="4160520"/>
-            <a:ext cx="7498079" cy="237744"/>
-          </a:xfrm>
-          <a:prstGeom prst="rect">
-            <a:avLst/>
-          </a:prstGeom>
-          <a:noFill/>
-        </p:spPr>
-        <p:txBody>
-          <a:bodyPr wrap="square" lIns="0" rIns="0" tIns="0" bIns="0" anchor="t">
-            <a:spAutoFit/>
-          </a:bodyPr>
-          <a:lstStyle/>
-          <a:p>
-            <a:pPr algn="l"/>
-            <a:r>
-              <a:rPr sz="1050" b="0">
-                <a:solidFill>
-                  <a:srgbClr val="CADCFC"/>
-                </a:solidFill>
-                <a:latin typeface="Meiryo UI"/>
-              </a:rPr>
-              <a:t>・ 境港は通期粗利前期比96.0%・計画比94.7%と唯一の減益。水産部は9月粗利率28.2%（前期30.7%）と低下</a:t>
-            </a:r>
-          </a:p>
-        </p:txBody>
-      </p:sp>
-      <p:sp>
-        <p:nvSpPr>
           <p:cNvPr id="14" name="TextBox 13"/>
           <p:cNvSpPr txBox="1"/>
           <p:nvPr/>
         </p:nvSpPr>
         <p:spPr>
           <a:xfrm>
-            <a:off x="548640" y="4572000"/>
+            <a:off x="548640" y="3977639"/>
             <a:ext cx="8229600" cy="256032"/>
           </a:xfrm>
           <a:prstGeom prst="rect">
@@ -4355,7 +4239,7 @@
         </p:nvSpPr>
         <p:spPr>
           <a:xfrm>
-            <a:off x="548640" y="4828032"/>
+            <a:off x="548640" y="4279392"/>
             <a:ext cx="8229600" cy="237744"/>
           </a:xfrm>
           <a:prstGeom prst="rect">
@@ -17541,7 +17425,7 @@
                 </a:solidFill>
                 <a:latin typeface="Meiryo UI"/>
               </a:rPr>
-              <a:t>【警戒】境港の通期減益と、売上増でも粗利率が低下した部門</a:t>
+              <a:t>【警戒】価格改定の検証　～数量の落ち込みはないか～</a:t>
             </a:r>
           </a:p>
         </p:txBody>
@@ -17576,7 +17460,7 @@
                 </a:solidFill>
                 <a:latin typeface="Meiryo UI"/>
               </a:rPr>
-              <a:t>・ 境港は9月粗利68.6%（前期機械大口の反動）。通期も粗利96.0%・計画比94.7%と唯一の減益</a:t>
+              <a:t>・ 継続取扱品の単価は前年比+19.2%、数量は98.6%。増益は価格改定の効果が主因</a:t>
             </a:r>
           </a:p>
         </p:txBody>
@@ -17611,7 +17495,7 @@
                 </a:solidFill>
                 <a:latin typeface="Meiryo UI"/>
               </a:rPr>
-              <a:t>・ 全社粗利前期比は7月113.9%→8月93.3%→9月106.3%。石見は粗利114.0%へ回復も売上計画比95.8%と未達</a:t>
+              <a:t>・ 石見は単価+17.1%に対し数量90.8%と減少。スチロール成形品の積水化成品西部向け等</a:t>
             </a:r>
           </a:p>
         </p:txBody>
@@ -17646,7 +17530,7 @@
                 </a:solidFill>
                 <a:latin typeface="Meiryo UI"/>
               </a:rPr>
-              <a:t>・ 水産部は9月粗利率28.2%（前期30.7%）、キョウワは通期粗利95.3%。売上増でも利幅が落ちる先は値決めを点検</a:t>
+              <a:t>・ 継続取引先597先中203先は、値上げ後も売上が前年比10%超減。数量を要確認</a:t>
             </a:r>
           </a:p>
         </p:txBody>
@@ -17922,7 +17806,7 @@
                 </a:solidFill>
                 <a:latin typeface="Meiryo UI"/>
               </a:rPr>
-              <a:t>第51期は粗利益額888,359千円で増益着地。第52期は境港の立て直しと、価格改定効果一巡後の粗利率維持が焦点</a:t>
+              <a:t>第51期は粗利益額888,359千円で増益着地。第52期は価格改定後の数量（特に石見）の確認と粗利率の維持が焦点</a:t>
             </a:r>
           </a:p>
         </p:txBody>
